--- a/public/fun/pack/pptx/reviewpro/보장점검양식프리미엄_13_가족점검_오팔펄.pptx
+++ b/public/fun/pack/pptx/reviewpro/보장점검양식프리미엄_13_가족점검_오팔펄.pptx
@@ -112,12 +112,12 @@
   <p:extLst>
     <p:ext uri="{521415D9-36F7-43E2-AB2F-B90AF26B5E84}">
       <p14:sectionLst xmlns:p14="http://schemas.microsoft.com/office/powerpoint/2010/main">
-        <p14:section name="시작" id="{0723E296-867A-4D99-BB75-888B18C09F82}">
+        <p14:section name="시작" id="{5ECC24B4-31C5-43C7-A022-79830620E00A}">
           <p14:sldIdLst>
             <p14:sldId id="256"/>
           </p14:sldIdLst>
         </p14:section>
-        <p14:section name="본문" id="{87223A22-F342-4F74-A40E-D3FA372F5F30}">
+        <p14:section name="본문" id="{BFEB1521-E1AE-444B-A15D-62A9A3C90BF2}">
           <p14:sldIdLst>
             <p14:sldId id="257"/>
             <p14:sldId id="258"/>
@@ -1604,7 +1604,7 @@
             </a:lvl1pPr>
           </a:lstStyle>
           <a:p>
-            <a:fld id="{DC508A2E-C4DF-490D-88BF-D7B0CC23AFCE}" type="slidenum">
+            <a:fld id="{9CDFCDF3-1D0F-41DE-9822-751CB1CD8C36}" type="slidenum">
               <a:rPr lang="en-US"/>
               <a:t>‹#›</a:t>
             </a:fld>
@@ -2404,7 +2404,7 @@
             </a:lvl1pPr>
           </a:lstStyle>
           <a:p>
-            <a:fld id="{D521A347-7FFA-437E-AE33-4325A1010A57}" type="slidenum">
+            <a:fld id="{EC752947-1A13-4038-8B03-0D5457E71D93}" type="slidenum">
               <a:rPr lang="en-US"/>
               <a:t>‹#›</a:t>
             </a:fld>
@@ -3157,7 +3157,7 @@
             </a:lvl1pPr>
           </a:lstStyle>
           <a:p>
-            <a:fld id="{76669404-5957-45AF-A66D-6160E0B2CC2D}" type="slidenum">
+            <a:fld id="{D8C49AEC-217F-445D-BCDF-35BB4D38DB4A}" type="slidenum">
               <a:rPr lang="en-US"/>
               <a:t>‹#›</a:t>
             </a:fld>
@@ -4105,7 +4105,7 @@
           <a:p>
             <a:r>
               <a:rPr lang="ko-KR"/>
-              <a:t>가족 점검 · 0000. 00. 00</a:t>
+              <a:t>가족 점검 · 날짜 입력</a:t>
             </a:r>
           </a:p>
           <a:p>
@@ -4196,7 +4196,7 @@
           <a:bodyPr/>
           <a:lstStyle/>
           <a:p>
-            <a:fld id="{788A635A-8F9F-4683-96B3-B76839F859D6}" type="slidenum">
+            <a:fld id="{2C182784-6B37-4332-800E-1549CA32E0AC}" type="slidenum">
               <a:rPr lang="en-US"/>
               <a:t>‹#›</a:t>
             </a:fld>
@@ -5106,7 +5106,7 @@
           <a:bodyPr/>
           <a:lstStyle/>
           <a:p>
-            <a:fld id="{58460EFA-46D8-464A-9A6F-BFB8D02E7DF7}" type="slidenum">
+            <a:fld id="{5A5C62E4-FC48-42F0-B62C-AE586F8AA740}" type="slidenum">
               <a:rPr lang="en-US"/>
               <a:t>‹#›</a:t>
             </a:fld>
@@ -6612,7 +6612,7 @@
           <a:bodyPr/>
           <a:lstStyle/>
           <a:p>
-            <a:fld id="{6C49F8D5-38BF-43A1-BB78-6768F5C53AC5}" type="slidenum">
+            <a:fld id="{FBE824EC-51BC-4C07-A3B3-D65A287EC4E9}" type="slidenum">
               <a:rPr lang="en-US"/>
               <a:t>‹#›</a:t>
             </a:fld>
@@ -8162,7 +8162,7 @@
           <a:bodyPr/>
           <a:lstStyle/>
           <a:p>
-            <a:fld id="{8EC476FA-8B24-4E40-B2C9-6FD7EEFE7CEF}" type="slidenum">
+            <a:fld id="{59D52FB9-5371-4960-A6EE-7A58EA87C500}" type="slidenum">
               <a:rPr lang="en-US"/>
               <a:t>‹#›</a:t>
             </a:fld>
@@ -9108,7 +9108,7 @@
           <a:bodyPr/>
           <a:lstStyle/>
           <a:p>
-            <a:fld id="{24A66EFE-61D9-4BF4-957E-06B7B6259F5D}" type="slidenum">
+            <a:fld id="{25BF4F78-4ECC-4CCB-9C19-0736B06D9DCE}" type="slidenum">
               <a:rPr lang="en-US"/>
               <a:t>‹#›</a:t>
             </a:fld>
